--- a/classes/parte-8-blue-team-deteccion-y-soc/188-threat-hunting-metodologia/clase-188-presentacion.pptx
+++ b/classes/parte-8-blue-team-deteccion-y-soc/188-threat-hunting-metodologia/clase-188-presentacion.pptx
@@ -17,6 +17,11 @@
     <p:sldId id="265" r:id="rId16"/>
     <p:sldId id="266" r:id="rId17"/>
     <p:sldId id="267" r:id="rId18"/>
+    <p:sldId id="268" r:id="rId19"/>
+    <p:sldId id="269" r:id="rId20"/>
+    <p:sldId id="270" r:id="rId21"/>
+    <p:sldId id="271" r:id="rId22"/>
+    <p:sldId id="272" r:id="rId23"/>
   </p:sldIdLst>
   <p:sldSz cx="9144000" cy="6858000" type="screen4x3"/>
   <p:notesSz cx="6858000" cy="9144000"/>
@@ -3198,7 +3203,7 @@
                   <a:srgbClr val="0B3D2E"/>
                 </a:solidFill>
               </a:rPr>
-              <a:t>⚠️ Errores comunes</a:t>
+              <a:t>🧰 Herramientas y preparación</a:t>
             </a:r>
           </a:p>
         </p:txBody>
@@ -3236,67 +3241,67 @@
                   <a:srgbClr val="22282E"/>
                 </a:solidFill>
               </a:rPr>
-              <a:t>•  "Cazar" abriendo dashboards al azar — Falta hipótesis; empieza siempre por una pregunta comprobable</a:t>
-            </a:r>
-          </a:p>
-          <a:p>
-            <a:pPr>
-              <a:spcAft>
-                <a:spcPts val="600"/>
-              </a:spcAft>
-            </a:pPr>
-            <a:r>
-              <a:rPr sz="1500">
-                <a:solidFill>
-                  <a:srgbClr val="22282E"/>
-                </a:solidFill>
-              </a:rPr>
-              <a:t>•  Todo parece sospechoso — No hay baseline; modela lo normal primero</a:t>
-            </a:r>
-          </a:p>
-          <a:p>
-            <a:pPr>
-              <a:spcAft>
-                <a:spcPts val="600"/>
-              </a:spcAft>
-            </a:pPr>
-            <a:r>
-              <a:rPr sz="1500">
-                <a:solidFill>
-                  <a:srgbClr val="22282E"/>
-                </a:solidFill>
-              </a:rPr>
-              <a:t>•  Hallazgos que no se reutilizan — No capitalizas; convierte cada caza en detección o baseline</a:t>
-            </a:r>
-          </a:p>
-          <a:p>
-            <a:pPr>
-              <a:spcAft>
-                <a:spcPts val="600"/>
-              </a:spcAft>
-            </a:pPr>
-            <a:r>
-              <a:rPr sz="1500">
-                <a:solidFill>
-                  <a:srgbClr val="22282E"/>
-                </a:solidFill>
-              </a:rPr>
-              <a:t>•  Cacerías irreproducibles — Sin documentación; registra consultas y decisiones</a:t>
-            </a:r>
-          </a:p>
-          <a:p>
-            <a:pPr>
-              <a:spcAft>
-                <a:spcPts val="600"/>
-              </a:spcAft>
-            </a:pPr>
-            <a:r>
-              <a:rPr sz="1500">
-                <a:solidFill>
-                  <a:srgbClr val="22282E"/>
-                </a:solidFill>
-              </a:rPr>
-              <a:t>•  Nunca encuentras nada — Datos insuficientes o hipótesis inverosímil; ajusta telemetría o pregunta</a:t>
+              <a:t>•  Tu SIEM (Splunk/Elastic) con telemetría de endpoint y red de clases previas.</a:t>
+            </a:r>
+          </a:p>
+          <a:p>
+            <a:pPr>
+              <a:spcAft>
+                <a:spcPts val="600"/>
+              </a:spcAft>
+            </a:pPr>
+            <a:r>
+              <a:rPr sz="1500">
+                <a:solidFill>
+                  <a:srgbClr val="22282E"/>
+                </a:solidFill>
+              </a:rPr>
+              <a:t>•  Jupyter Notebook o un documento estructurado para registrar la cacería.</a:t>
+            </a:r>
+          </a:p>
+          <a:p>
+            <a:pPr>
+              <a:spcAft>
+                <a:spcPts val="600"/>
+              </a:spcAft>
+            </a:pPr>
+            <a:r>
+              <a:rPr sz="1500">
+                <a:solidFill>
+                  <a:srgbClr val="22282E"/>
+                </a:solidFill>
+              </a:rPr>
+              <a:t>•  Atomic Red Team para generar actividad de prueba que después "cazarás" (en laboratorio propio).</a:t>
+            </a:r>
+          </a:p>
+          <a:p>
+            <a:pPr>
+              <a:spcAft>
+                <a:spcPts val="600"/>
+              </a:spcAft>
+            </a:pPr>
+            <a:r>
+              <a:rPr sz="1500">
+                <a:solidFill>
+                  <a:srgbClr val="22282E"/>
+                </a:solidFill>
+              </a:rPr>
+              <a:t>•  El catálogo ATT&amp;CK como fuente de hipótesis.</a:t>
+            </a:r>
+          </a:p>
+          <a:p>
+            <a:pPr>
+              <a:spcAft>
+                <a:spcPts val="600"/>
+              </a:spcAft>
+            </a:pPr>
+            <a:r>
+              <a:rPr sz="1500">
+                <a:solidFill>
+                  <a:srgbClr val="22282E"/>
+                </a:solidFill>
+              </a:rPr>
+              <a:t>•  Toda ejecución de técnicas para practicar la caza se realiza en tu entorno aislado y autorizado.</a:t>
             </a:r>
           </a:p>
         </p:txBody>
@@ -3347,7 +3352,7 @@
                   <a:srgbClr val="0B3D2E"/>
                 </a:solidFill>
               </a:rPr>
-              <a:t>❓ Preguntas frecuentes</a:t>
+              <a:t>🧪 Laboratorio guiado — Una cacería de principio a fin</a:t>
             </a:r>
           </a:p>
         </p:txBody>
@@ -3385,82 +3390,97 @@
                   <a:srgbClr val="22282E"/>
                 </a:solidFill>
               </a:rPr>
-              <a:t>•  ❓ ¿El hunting requiere herramientas caras?</a:t>
-            </a:r>
-          </a:p>
-          <a:p>
-            <a:pPr>
-              <a:spcAft>
-                <a:spcPts val="600"/>
-              </a:spcAft>
-            </a:pPr>
-            <a:r>
-              <a:rPr sz="1500">
-                <a:solidFill>
-                  <a:srgbClr val="22282E"/>
-                </a:solidFill>
-              </a:rPr>
-              <a:t>•  No. Requiere buena telemetría, hipótesis y método. Con un SIEM open source y Sysmon ya puedes cazar; la madurez viene del proceso, no del precio.</a:t>
-            </a:r>
-          </a:p>
-          <a:p>
-            <a:pPr>
-              <a:spcAft>
-                <a:spcPts val="600"/>
-              </a:spcAft>
-            </a:pPr>
-            <a:r>
-              <a:rPr sz="1500">
-                <a:solidFill>
-                  <a:srgbClr val="22282E"/>
-                </a:solidFill>
-              </a:rPr>
-              <a:t>•  ❓ ¿Cazar es buscar sin saber qué?</a:t>
-            </a:r>
-          </a:p>
-          <a:p>
-            <a:pPr>
-              <a:spcAft>
-                <a:spcPts val="600"/>
-              </a:spcAft>
-            </a:pPr>
-            <a:r>
-              <a:rPr sz="1500">
-                <a:solidFill>
-                  <a:srgbClr val="22282E"/>
-                </a:solidFill>
-              </a:rPr>
-              <a:t>•  Al contrario. Sin hipótesis no es caza, es navegación aleatoria. La hipótesis enfoca el esfuerzo y hace medible el resultado.</a:t>
-            </a:r>
-          </a:p>
-          <a:p>
-            <a:pPr>
-              <a:spcAft>
-                <a:spcPts val="600"/>
-              </a:spcAft>
-            </a:pPr>
-            <a:r>
-              <a:rPr sz="1500">
-                <a:solidFill>
-                  <a:srgbClr val="22282E"/>
-                </a:solidFill>
-              </a:rPr>
-              <a:t>•  ❓ ¿Cada cacería debe encontrar un atacante?</a:t>
-            </a:r>
-          </a:p>
-          <a:p>
-            <a:pPr>
-              <a:spcAft>
-                <a:spcPts val="600"/>
-              </a:spcAft>
-            </a:pPr>
-            <a:r>
-              <a:rPr sz="1500">
-                <a:solidFill>
-                  <a:srgbClr val="22282E"/>
-                </a:solidFill>
-              </a:rPr>
-              <a:t>•  No. Una cacería "sin hallazgo" es valiosa: valida controles, mejora baselines y suele revelar higiene o puntos ciegos que corregir.</a:t>
+              <a:t>•  Prepara (PEAK). Elige una técnica: T1053.005 (Scheduled Task/Job). Formula la hipótesis: "un adversario ha creado tareas programadas para persistir en algún host".</a:t>
+            </a:r>
+          </a:p>
+          <a:p>
+            <a:pPr>
+              <a:spcAft>
+                <a:spcPts val="600"/>
+              </a:spcAft>
+            </a:pPr>
+            <a:r>
+              <a:rPr sz="1500">
+                <a:solidFill>
+                  <a:srgbClr val="22282E"/>
+                </a:solidFill>
+              </a:rPr>
+              <a:t>•  Define datos y ámbito. Identifica la telemetría (Sysmon Event ID 1/schtasks, Security 4698) y el rango temporal (últimos 7 días).</a:t>
+            </a:r>
+          </a:p>
+          <a:p>
+            <a:pPr>
+              <a:spcAft>
+                <a:spcPts val="600"/>
+              </a:spcAft>
+            </a:pPr>
+            <a:r>
+              <a:rPr sz="1500">
+                <a:solidFill>
+                  <a:srgbClr val="22282E"/>
+                </a:solidFill>
+              </a:rPr>
+              <a:t>•  Construye la baseline. Lista las tareas programadas legítimas y sus creadores habituales para separar ruido de señal.</a:t>
+            </a:r>
+          </a:p>
+          <a:p>
+            <a:pPr>
+              <a:spcAft>
+                <a:spcPts val="600"/>
+              </a:spcAft>
+            </a:pPr>
+            <a:r>
+              <a:rPr sz="1500">
+                <a:solidFill>
+                  <a:srgbClr val="22282E"/>
+                </a:solidFill>
+              </a:rPr>
+              <a:t>•  Ejecuta la búsqueda. En el SIEM, filtra creaciones de tareas y agrupa por host, usuario y binario invocado; ordena por rareza.</a:t>
+            </a:r>
+          </a:p>
+          <a:p>
+            <a:pPr>
+              <a:spcAft>
+                <a:spcPts val="600"/>
+              </a:spcAft>
+            </a:pPr>
+            <a:r>
+              <a:rPr sz="1500">
+                <a:solidFill>
+                  <a:srgbClr val="22282E"/>
+                </a:solidFill>
+              </a:rPr>
+              <a:t>•  Investiga outliers. Para las tareas raras, pivota: ¿qué proceso las creó?, ¿hay conexión de red asociada?, ¿el binario está firmado?</a:t>
+            </a:r>
+          </a:p>
+          <a:p>
+            <a:pPr>
+              <a:spcAft>
+                <a:spcPts val="600"/>
+              </a:spcAft>
+            </a:pPr>
+            <a:r>
+              <a:rPr sz="1500">
+                <a:solidFill>
+                  <a:srgbClr val="22282E"/>
+                </a:solidFill>
+              </a:rPr>
+              <a:t>•  Genera actividad de control. Con Atomic Red Team lanza una técnica de tarea programada y confirma que tu búsqueda la habría encontrado.</a:t>
+            </a:r>
+          </a:p>
+          <a:p>
+            <a:pPr>
+              <a:spcAft>
+                <a:spcPts val="600"/>
+              </a:spcAft>
+            </a:pPr>
+            <a:r>
+              <a:rPr sz="1500">
+                <a:solidFill>
+                  <a:srgbClr val="22282E"/>
+                </a:solidFill>
+              </a:rPr>
+              <a:t>•  Capitaliza. Convierte la búsqueda en una regla Sigma/alerta para automatizar la detección a futuro.</a:t>
             </a:r>
           </a:p>
         </p:txBody>
@@ -3511,7 +3531,7 @@
                   <a:srgbClr val="0B3D2E"/>
                 </a:solidFill>
               </a:rPr>
-              <a:t>🔗 Referencias</a:t>
+              <a:t>✍️ Ejercicios</a:t>
             </a:r>
           </a:p>
         </p:txBody>
@@ -3549,71 +3569,712 @@
                   <a:srgbClr val="22282E"/>
                 </a:solidFill>
               </a:rPr>
-              <a:t>•  Bejtlich, R. The Practice of Network Security Monitoring. No Starch Press.</a:t>
-            </a:r>
-          </a:p>
-          <a:p>
-            <a:pPr>
-              <a:spcAft>
-                <a:spcPts val="600"/>
-              </a:spcAft>
-            </a:pPr>
-            <a:r>
-              <a:rPr sz="1500">
-                <a:solidFill>
-                  <a:srgbClr val="22282E"/>
-                </a:solidFill>
-              </a:rPr>
-              <a:t>•  Bianco, D. "The Hunting Maturity Model" — &lt;http://detect-respond.blogspot.com/&gt;</a:t>
-            </a:r>
-          </a:p>
-          <a:p>
-            <a:pPr>
-              <a:spcAft>
-                <a:spcPts val="600"/>
-              </a:spcAft>
-            </a:pPr>
-            <a:r>
-              <a:rPr sz="1500">
-                <a:solidFill>
-                  <a:srgbClr val="22282E"/>
-                </a:solidFill>
-              </a:rPr>
-              <a:t>•  SURFcert, TaHiTI Threat Hunting Methodology.</a:t>
-            </a:r>
-          </a:p>
-          <a:p>
-            <a:pPr>
-              <a:spcAft>
-                <a:spcPts val="600"/>
-              </a:spcAft>
-            </a:pPr>
-            <a:r>
-              <a:rPr sz="1500">
-                <a:solidFill>
-                  <a:srgbClr val="22282E"/>
-                </a:solidFill>
-              </a:rPr>
-              <a:t>•  Splunk, PEAK Threat Hunting Framework — &lt;https://www.splunk.com/enus/blog/security/peak-threat-hunting-framework.html&gt;</a:t>
-            </a:r>
-          </a:p>
-          <a:p>
-            <a:pPr>
-              <a:spcAft>
-                <a:spcPts val="600"/>
-              </a:spcAft>
-            </a:pPr>
-            <a:r>
-              <a:rPr sz="1500">
-                <a:solidFill>
-                  <a:srgbClr val="22282E"/>
-                </a:solidFill>
-              </a:rPr>
-              <a:t>•  MITRE ATT&amp;CK — &lt;https://attack.mitre.org/&gt;</a:t>
-            </a:r>
-          </a:p>
-        </p:txBody>
-      </p:sp>
+              <a:t>•  Redacta 3 hipótesis de caza a partir de técnicas ATT&amp;CK distintas.</a:t>
+            </a:r>
+          </a:p>
+          <a:p>
+            <a:pPr>
+              <a:spcAft>
+                <a:spcPts val="600"/>
+              </a:spcAft>
+            </a:pPr>
+            <a:r>
+              <a:rPr sz="1500">
+                <a:solidFill>
+                  <a:srgbClr val="22282E"/>
+                </a:solidFill>
+              </a:rPr>
+              <a:t>•  Sitúa a tu SOC en el HMM y define el paso para subir un nivel.</a:t>
+            </a:r>
+          </a:p>
+          <a:p>
+            <a:pPr>
+              <a:spcAft>
+                <a:spcPts val="600"/>
+              </a:spcAft>
+            </a:pPr>
+            <a:r>
+              <a:rPr sz="1500">
+                <a:solidFill>
+                  <a:srgbClr val="22282E"/>
+                </a:solidFill>
+              </a:rPr>
+              <a:t>•  Construye una baseline de procesos que hacen conexiones salientes.</a:t>
+            </a:r>
+          </a:p>
+          <a:p>
+            <a:pPr>
+              <a:spcAft>
+                <a:spcPts val="600"/>
+              </a:spcAft>
+            </a:pPr>
+            <a:r>
+              <a:rPr sz="1500">
+                <a:solidFill>
+                  <a:srgbClr val="22282E"/>
+                </a:solidFill>
+              </a:rPr>
+              <a:t>•  Diseña una cacería de "living off the land" (LOLBins) y sus consultas.</a:t>
+            </a:r>
+          </a:p>
+          <a:p>
+            <a:pPr>
+              <a:spcAft>
+                <a:spcPts val="600"/>
+              </a:spcAft>
+            </a:pPr>
+            <a:r>
+              <a:rPr sz="1500">
+                <a:solidFill>
+                  <a:srgbClr val="22282E"/>
+                </a:solidFill>
+              </a:rPr>
+              <a:t>•  Convierte un hallazgo de caza en una regla Sigma.</a:t>
+            </a:r>
+          </a:p>
+          <a:p>
+            <a:pPr>
+              <a:spcAft>
+                <a:spcPts val="600"/>
+              </a:spcAft>
+            </a:pPr>
+            <a:r>
+              <a:rPr sz="1500">
+                <a:solidFill>
+                  <a:srgbClr val="22282E"/>
+                </a:solidFill>
+              </a:rPr>
+              <a:t>•  Define 3 métricas de éxito de una cacería.</a:t>
+            </a:r>
+          </a:p>
+        </p:txBody>
+      </p:sp>
+    </p:spTree>
+  </p:cSld>
+  <p:clrMapOvr>
+    <a:masterClrMapping/>
+  </p:clrMapOvr>
+</p:sld>
+</file>
+
+<file path=ppt/slides/slide13.xml><?xml version="1.0" encoding="utf-8"?>
+<p:sld xmlns:a="http://schemas.openxmlformats.org/drawingml/2006/main" xmlns:p="http://schemas.openxmlformats.org/presentationml/2006/main" xmlns:r="http://schemas.openxmlformats.org/officeDocument/2006/relationships">
+  <p:cSld>
+    <p:spTree>
+      <p:nvGrpSpPr>
+        <p:cNvPr id="1" name=""/>
+        <p:cNvGrpSpPr/>
+        <p:nvPr/>
+      </p:nvGrpSpPr>
+      <p:grpSpPr/>
+      <p:sp>
+        <p:nvSpPr>
+          <p:cNvPr id="2" name="TextBox 1"/>
+          <p:cNvSpPr txBox="1"/>
+          <p:nvPr/>
+        </p:nvSpPr>
+        <p:spPr>
+          <a:xfrm>
+            <a:off x="457200" y="320040"/>
+            <a:ext cx="8229600" cy="822960"/>
+          </a:xfrm>
+          <a:prstGeom prst="rect">
+            <a:avLst/>
+          </a:prstGeom>
+          <a:noFill/>
+        </p:spPr>
+        <p:txBody>
+          <a:bodyPr wrap="square">
+            <a:spAutoFit/>
+          </a:bodyPr>
+          <a:lstStyle/>
+          <a:p>
+            <a:r>
+              <a:rPr sz="2600" b="1">
+                <a:solidFill>
+                  <a:srgbClr val="0B3D2E"/>
+                </a:solidFill>
+              </a:rPr>
+              <a:t>📝 Reto verificable</a:t>
+            </a:r>
+          </a:p>
+        </p:txBody>
+      </p:sp>
+      <p:sp>
+        <p:nvSpPr>
+          <p:cNvPr id="3" name="TextBox 2"/>
+          <p:cNvSpPr txBox="1"/>
+          <p:nvPr/>
+        </p:nvSpPr>
+        <p:spPr>
+          <a:xfrm>
+            <a:off x="457200" y="1280160"/>
+            <a:ext cx="8229600" cy="4937760"/>
+          </a:xfrm>
+          <a:prstGeom prst="rect">
+            <a:avLst/>
+          </a:prstGeom>
+          <a:noFill/>
+        </p:spPr>
+        <p:txBody>
+          <a:bodyPr wrap="square">
+            <a:spAutoFit/>
+          </a:bodyPr>
+          <a:lstStyle/>
+          <a:p>
+            <a:pPr>
+              <a:spcAft>
+                <a:spcPts val="600"/>
+              </a:spcAft>
+            </a:pPr>
+            <a:r>
+              <a:rPr sz="1500">
+                <a:solidFill>
+                  <a:srgbClr val="22282E"/>
+                </a:solidFill>
+              </a:rPr>
+              <a:t>•  Ejecuta una cacería completa documentada (hipótesis, datos, consultas, hallazgos y detección resultante) sobre una técnica ATT&amp;CK a tu elección. Criterio de aceptación: la actividad de control que…</a:t>
+            </a:r>
+          </a:p>
+        </p:txBody>
+      </p:sp>
+    </p:spTree>
+  </p:cSld>
+  <p:clrMapOvr>
+    <a:masterClrMapping/>
+  </p:clrMapOvr>
+</p:sld>
+</file>
+
+<file path=ppt/slides/slide14.xml><?xml version="1.0" encoding="utf-8"?>
+<p:sld xmlns:a="http://schemas.openxmlformats.org/drawingml/2006/main" xmlns:p="http://schemas.openxmlformats.org/presentationml/2006/main" xmlns:r="http://schemas.openxmlformats.org/officeDocument/2006/relationships">
+  <p:cSld>
+    <p:spTree>
+      <p:nvGrpSpPr>
+        <p:cNvPr id="1" name=""/>
+        <p:cNvGrpSpPr/>
+        <p:nvPr/>
+      </p:nvGrpSpPr>
+      <p:grpSpPr/>
+      <p:sp>
+        <p:nvSpPr>
+          <p:cNvPr id="2" name="TextBox 1"/>
+          <p:cNvSpPr txBox="1"/>
+          <p:nvPr/>
+        </p:nvSpPr>
+        <p:spPr>
+          <a:xfrm>
+            <a:off x="457200" y="320040"/>
+            <a:ext cx="8229600" cy="822960"/>
+          </a:xfrm>
+          <a:prstGeom prst="rect">
+            <a:avLst/>
+          </a:prstGeom>
+          <a:noFill/>
+        </p:spPr>
+        <p:txBody>
+          <a:bodyPr wrap="square">
+            <a:spAutoFit/>
+          </a:bodyPr>
+          <a:lstStyle/>
+          <a:p>
+            <a:r>
+              <a:rPr sz="2600" b="1">
+                <a:solidFill>
+                  <a:srgbClr val="0B3D2E"/>
+                </a:solidFill>
+              </a:rPr>
+              <a:t>⚠️ Errores comunes</a:t>
+            </a:r>
+          </a:p>
+        </p:txBody>
+      </p:sp>
+      <p:sp>
+        <p:nvSpPr>
+          <p:cNvPr id="3" name="TextBox 2"/>
+          <p:cNvSpPr txBox="1"/>
+          <p:nvPr/>
+        </p:nvSpPr>
+        <p:spPr>
+          <a:xfrm>
+            <a:off x="457200" y="1280160"/>
+            <a:ext cx="8229600" cy="4937760"/>
+          </a:xfrm>
+          <a:prstGeom prst="rect">
+            <a:avLst/>
+          </a:prstGeom>
+          <a:noFill/>
+        </p:spPr>
+        <p:txBody>
+          <a:bodyPr wrap="square">
+            <a:spAutoFit/>
+          </a:bodyPr>
+          <a:lstStyle/>
+          <a:p>
+            <a:pPr>
+              <a:spcAft>
+                <a:spcPts val="600"/>
+              </a:spcAft>
+            </a:pPr>
+            <a:r>
+              <a:rPr sz="1500">
+                <a:solidFill>
+                  <a:srgbClr val="22282E"/>
+                </a:solidFill>
+              </a:rPr>
+              <a:t>•  "Cazar" abriendo dashboards al azar — Falta hipótesis; empieza siempre por una pregunta comprobable</a:t>
+            </a:r>
+          </a:p>
+          <a:p>
+            <a:pPr>
+              <a:spcAft>
+                <a:spcPts val="600"/>
+              </a:spcAft>
+            </a:pPr>
+            <a:r>
+              <a:rPr sz="1500">
+                <a:solidFill>
+                  <a:srgbClr val="22282E"/>
+                </a:solidFill>
+              </a:rPr>
+              <a:t>•  Todo parece sospechoso — No hay baseline; modela lo normal primero</a:t>
+            </a:r>
+          </a:p>
+          <a:p>
+            <a:pPr>
+              <a:spcAft>
+                <a:spcPts val="600"/>
+              </a:spcAft>
+            </a:pPr>
+            <a:r>
+              <a:rPr sz="1500">
+                <a:solidFill>
+                  <a:srgbClr val="22282E"/>
+                </a:solidFill>
+              </a:rPr>
+              <a:t>•  Hallazgos que no se reutilizan — No capitalizas; convierte cada caza en detección o baseline</a:t>
+            </a:r>
+          </a:p>
+          <a:p>
+            <a:pPr>
+              <a:spcAft>
+                <a:spcPts val="600"/>
+              </a:spcAft>
+            </a:pPr>
+            <a:r>
+              <a:rPr sz="1500">
+                <a:solidFill>
+                  <a:srgbClr val="22282E"/>
+                </a:solidFill>
+              </a:rPr>
+              <a:t>•  Cacerías irreproducibles — Sin documentación; registra consultas y decisiones</a:t>
+            </a:r>
+          </a:p>
+          <a:p>
+            <a:pPr>
+              <a:spcAft>
+                <a:spcPts val="600"/>
+              </a:spcAft>
+            </a:pPr>
+            <a:r>
+              <a:rPr sz="1500">
+                <a:solidFill>
+                  <a:srgbClr val="22282E"/>
+                </a:solidFill>
+              </a:rPr>
+              <a:t>•  Nunca encuentras nada — Datos insuficientes o hipótesis inverosímil; ajusta telemetría o pregunta</a:t>
+            </a:r>
+          </a:p>
+        </p:txBody>
+      </p:sp>
+    </p:spTree>
+  </p:cSld>
+  <p:clrMapOvr>
+    <a:masterClrMapping/>
+  </p:clrMapOvr>
+</p:sld>
+</file>
+
+<file path=ppt/slides/slide15.xml><?xml version="1.0" encoding="utf-8"?>
+<p:sld xmlns:a="http://schemas.openxmlformats.org/drawingml/2006/main" xmlns:p="http://schemas.openxmlformats.org/presentationml/2006/main" xmlns:r="http://schemas.openxmlformats.org/officeDocument/2006/relationships">
+  <p:cSld>
+    <p:spTree>
+      <p:nvGrpSpPr>
+        <p:cNvPr id="1" name=""/>
+        <p:cNvGrpSpPr/>
+        <p:nvPr/>
+      </p:nvGrpSpPr>
+      <p:grpSpPr/>
+      <p:sp>
+        <p:nvSpPr>
+          <p:cNvPr id="2" name="TextBox 1"/>
+          <p:cNvSpPr txBox="1"/>
+          <p:nvPr/>
+        </p:nvSpPr>
+        <p:spPr>
+          <a:xfrm>
+            <a:off x="457200" y="320040"/>
+            <a:ext cx="8229600" cy="822960"/>
+          </a:xfrm>
+          <a:prstGeom prst="rect">
+            <a:avLst/>
+          </a:prstGeom>
+          <a:noFill/>
+        </p:spPr>
+        <p:txBody>
+          <a:bodyPr wrap="square">
+            <a:spAutoFit/>
+          </a:bodyPr>
+          <a:lstStyle/>
+          <a:p>
+            <a:r>
+              <a:rPr sz="2600" b="1">
+                <a:solidFill>
+                  <a:srgbClr val="0B3D2E"/>
+                </a:solidFill>
+              </a:rPr>
+              <a:t>❓ Preguntas frecuentes</a:t>
+            </a:r>
+          </a:p>
+        </p:txBody>
+      </p:sp>
+      <p:sp>
+        <p:nvSpPr>
+          <p:cNvPr id="3" name="TextBox 2"/>
+          <p:cNvSpPr txBox="1"/>
+          <p:nvPr/>
+        </p:nvSpPr>
+        <p:spPr>
+          <a:xfrm>
+            <a:off x="457200" y="1280160"/>
+            <a:ext cx="8229600" cy="4937760"/>
+          </a:xfrm>
+          <a:prstGeom prst="rect">
+            <a:avLst/>
+          </a:prstGeom>
+          <a:noFill/>
+        </p:spPr>
+        <p:txBody>
+          <a:bodyPr wrap="square">
+            <a:spAutoFit/>
+          </a:bodyPr>
+          <a:lstStyle/>
+          <a:p>
+            <a:pPr>
+              <a:spcAft>
+                <a:spcPts val="600"/>
+              </a:spcAft>
+            </a:pPr>
+            <a:r>
+              <a:rPr sz="1500">
+                <a:solidFill>
+                  <a:srgbClr val="22282E"/>
+                </a:solidFill>
+              </a:rPr>
+              <a:t>•  ❓ ¿El hunting requiere herramientas caras?</a:t>
+            </a:r>
+          </a:p>
+          <a:p>
+            <a:pPr>
+              <a:spcAft>
+                <a:spcPts val="600"/>
+              </a:spcAft>
+            </a:pPr>
+            <a:r>
+              <a:rPr sz="1500">
+                <a:solidFill>
+                  <a:srgbClr val="22282E"/>
+                </a:solidFill>
+              </a:rPr>
+              <a:t>•  No. Requiere buena telemetría, hipótesis y método. Con un SIEM open source y Sysmon ya puedes cazar; la madurez viene del proceso, no del precio.</a:t>
+            </a:r>
+          </a:p>
+          <a:p>
+            <a:pPr>
+              <a:spcAft>
+                <a:spcPts val="600"/>
+              </a:spcAft>
+            </a:pPr>
+            <a:r>
+              <a:rPr sz="1500">
+                <a:solidFill>
+                  <a:srgbClr val="22282E"/>
+                </a:solidFill>
+              </a:rPr>
+              <a:t>•  ❓ ¿Cazar es buscar sin saber qué?</a:t>
+            </a:r>
+          </a:p>
+          <a:p>
+            <a:pPr>
+              <a:spcAft>
+                <a:spcPts val="600"/>
+              </a:spcAft>
+            </a:pPr>
+            <a:r>
+              <a:rPr sz="1500">
+                <a:solidFill>
+                  <a:srgbClr val="22282E"/>
+                </a:solidFill>
+              </a:rPr>
+              <a:t>•  Al contrario. Sin hipótesis no es caza, es navegación aleatoria. La hipótesis enfoca el esfuerzo y hace medible el resultado.</a:t>
+            </a:r>
+          </a:p>
+          <a:p>
+            <a:pPr>
+              <a:spcAft>
+                <a:spcPts val="600"/>
+              </a:spcAft>
+            </a:pPr>
+            <a:r>
+              <a:rPr sz="1500">
+                <a:solidFill>
+                  <a:srgbClr val="22282E"/>
+                </a:solidFill>
+              </a:rPr>
+              <a:t>•  ❓ ¿Cada cacería debe encontrar un atacante?</a:t>
+            </a:r>
+          </a:p>
+          <a:p>
+            <a:pPr>
+              <a:spcAft>
+                <a:spcPts val="600"/>
+              </a:spcAft>
+            </a:pPr>
+            <a:r>
+              <a:rPr sz="1500">
+                <a:solidFill>
+                  <a:srgbClr val="22282E"/>
+                </a:solidFill>
+              </a:rPr>
+              <a:t>•  No. Una cacería "sin hallazgo" es valiosa: valida controles, mejora baselines y suele revelar higiene o puntos ciegos que corregir.</a:t>
+            </a:r>
+          </a:p>
+        </p:txBody>
+      </p:sp>
+    </p:spTree>
+  </p:cSld>
+  <p:clrMapOvr>
+    <a:masterClrMapping/>
+  </p:clrMapOvr>
+</p:sld>
+</file>
+
+<file path=ppt/slides/slide16.xml><?xml version="1.0" encoding="utf-8"?>
+<p:sld xmlns:a="http://schemas.openxmlformats.org/drawingml/2006/main" xmlns:p="http://schemas.openxmlformats.org/presentationml/2006/main" xmlns:r="http://schemas.openxmlformats.org/officeDocument/2006/relationships">
+  <p:cSld>
+    <p:spTree>
+      <p:nvGrpSpPr>
+        <p:cNvPr id="1" name=""/>
+        <p:cNvGrpSpPr/>
+        <p:nvPr/>
+      </p:nvGrpSpPr>
+      <p:grpSpPr/>
+      <p:sp>
+        <p:nvSpPr>
+          <p:cNvPr id="2" name="TextBox 1"/>
+          <p:cNvSpPr txBox="1"/>
+          <p:nvPr/>
+        </p:nvSpPr>
+        <p:spPr>
+          <a:xfrm>
+            <a:off x="457200" y="320040"/>
+            <a:ext cx="8229600" cy="822960"/>
+          </a:xfrm>
+          <a:prstGeom prst="rect">
+            <a:avLst/>
+          </a:prstGeom>
+          <a:noFill/>
+        </p:spPr>
+        <p:txBody>
+          <a:bodyPr wrap="square">
+            <a:spAutoFit/>
+          </a:bodyPr>
+          <a:lstStyle/>
+          <a:p>
+            <a:r>
+              <a:rPr sz="2600" b="1">
+                <a:solidFill>
+                  <a:srgbClr val="0B3D2E"/>
+                </a:solidFill>
+              </a:rPr>
+              <a:t>🔗 Referencias verificables y alcance</a:t>
+            </a:r>
+          </a:p>
+        </p:txBody>
+      </p:sp>
+      <p:sp>
+        <p:nvSpPr>
+          <p:cNvPr id="3" name="TextBox 2"/>
+          <p:cNvSpPr txBox="1"/>
+          <p:nvPr/>
+        </p:nvSpPr>
+        <p:spPr>
+          <a:xfrm>
+            <a:off x="457200" y="1280160"/>
+            <a:ext cx="8229600" cy="4937760"/>
+          </a:xfrm>
+          <a:prstGeom prst="rect">
+            <a:avLst/>
+          </a:prstGeom>
+          <a:noFill/>
+        </p:spPr>
+        <p:txBody>
+          <a:bodyPr wrap="square">
+            <a:spAutoFit/>
+          </a:bodyPr>
+          <a:lstStyle/>
+          <a:p>
+            <a:pPr>
+              <a:spcAft>
+                <a:spcPts val="600"/>
+              </a:spcAft>
+            </a:pPr>
+            <a:r>
+              <a:rPr sz="1500">
+                <a:solidFill>
+                  <a:srgbClr val="22282E"/>
+                </a:solidFill>
+              </a:rPr>
+              <a:t>•  Bianco, D. Hunting Maturity Model: fuente original del modelo de madurez; describe capacidad organizativa y no puntúa por sí solo la calidad de una cacería —…</a:t>
+            </a:r>
+          </a:p>
+          <a:p>
+            <a:pPr>
+              <a:spcAft>
+                <a:spcPts val="600"/>
+              </a:spcAft>
+            </a:pPr>
+            <a:r>
+              <a:rPr sz="1500">
+                <a:solidFill>
+                  <a:srgbClr val="22282E"/>
+                </a:solidFill>
+              </a:rPr>
+              <a:t>•  SURF, TaHiTI Threat Hunting Methodology: publicación original de la metodología para estructurar propósito, hipótesis, investigación y resultados —…</a:t>
+            </a:r>
+          </a:p>
+          <a:p>
+            <a:pPr>
+              <a:spcAft>
+                <a:spcPts val="600"/>
+              </a:spcAft>
+            </a:pPr>
+            <a:r>
+              <a:rPr sz="1500">
+                <a:solidFill>
+                  <a:srgbClr val="22282E"/>
+                </a:solidFill>
+              </a:rPr>
+              <a:t>•  Splunk, PEAK Threat Hunting Framework: material oficial para los enfoques hypothesis-driven, baseline y model-assisted — &lt;https://www.splunk.com/enus/form/the-peak-threat-hunting-framework.html&gt;</a:t>
+            </a:r>
+          </a:p>
+          <a:p>
+            <a:pPr>
+              <a:spcAft>
+                <a:spcPts val="600"/>
+              </a:spcAft>
+            </a:pPr>
+            <a:r>
+              <a:rPr sz="1500">
+                <a:solidFill>
+                  <a:srgbClr val="22282E"/>
+                </a:solidFill>
+              </a:rPr>
+              <a:t>•  MITRE ATT&amp;CK: fuente primaria de comportamientos que pueden originar hipótesis; elegir una técnica no demuestra que la hipótesis sea relevante localmente — &lt;https://attack.mitre.org/&gt;</a:t>
+            </a:r>
+          </a:p>
+          <a:p>
+            <a:pPr>
+              <a:spcAft>
+                <a:spcPts val="600"/>
+              </a:spcAft>
+            </a:pPr>
+            <a:r>
+              <a:rPr sz="1500">
+                <a:solidFill>
+                  <a:srgbClr val="22282E"/>
+                </a:solidFill>
+              </a:rPr>
+              <a:t>•  Bejtlich, R. The Practice of Network Security Monitoring. No Starch Press: bibliografía complementaria sobre investigación y monitoreo de red.</a:t>
+            </a:r>
+          </a:p>
+        </p:txBody>
+      </p:sp>
+    </p:spTree>
+  </p:cSld>
+  <p:clrMapOvr>
+    <a:masterClrMapping/>
+  </p:clrMapOvr>
+</p:sld>
+</file>
+
+<file path=ppt/slides/slide17.xml><?xml version="1.0" encoding="utf-8"?>
+<p:sld xmlns:a="http://schemas.openxmlformats.org/drawingml/2006/main" xmlns:p="http://schemas.openxmlformats.org/presentationml/2006/main" xmlns:r="http://schemas.openxmlformats.org/officeDocument/2006/relationships">
+  <p:cSld>
+    <p:spTree>
+      <p:nvGrpSpPr>
+        <p:cNvPr id="1" name=""/>
+        <p:cNvGrpSpPr/>
+        <p:nvPr/>
+      </p:nvGrpSpPr>
+      <p:grpSpPr/>
+      <p:sp>
+        <p:nvSpPr>
+          <p:cNvPr id="2" name="TextBox 1"/>
+          <p:cNvSpPr txBox="1"/>
+          <p:nvPr/>
+        </p:nvSpPr>
+        <p:spPr>
+          <a:xfrm>
+            <a:off x="457200" y="274320"/>
+            <a:ext cx="8229600" cy="640080"/>
+          </a:xfrm>
+          <a:prstGeom prst="rect">
+            <a:avLst/>
+          </a:prstGeom>
+          <a:noFill/>
+        </p:spPr>
+        <p:txBody>
+          <a:bodyPr wrap="square">
+            <a:spAutoFit/>
+          </a:bodyPr>
+          <a:lstStyle/>
+          <a:p>
+            <a:r>
+              <a:rPr sz="2200" b="1">
+                <a:solidFill>
+                  <a:srgbClr val="0B3D2E"/>
+                </a:solidFill>
+              </a:rPr>
+              <a:t>Diagrama de la clase</a:t>
+            </a:r>
+          </a:p>
+        </p:txBody>
+      </p:sp>
+      <p:pic>
+        <p:nvPicPr>
+          <p:cNvPr id="3" name="Picture 2" descr="5b8ebd9cbce9c3c6.png"/>
+          <p:cNvPicPr>
+            <a:picLocks noChangeAspect="1"/>
+          </p:cNvPicPr>
+          <p:nvPr/>
+        </p:nvPicPr>
+        <p:blipFill>
+          <a:blip r:embed="rId2"/>
+          <a:stretch>
+            <a:fillRect/>
+          </a:stretch>
+        </p:blipFill>
+        <p:spPr>
+          <a:xfrm>
+            <a:off x="457200" y="3104388"/>
+            <a:ext cx="8229600" cy="1289304"/>
+          </a:xfrm>
+          <a:prstGeom prst="rect">
+            <a:avLst/>
+          </a:prstGeom>
+        </p:spPr>
+      </p:pic>
     </p:spTree>
   </p:cSld>
   <p:clrMapOvr>
@@ -3698,7 +4359,7 @@
                   <a:srgbClr val="22282E"/>
                 </a:solidFill>
               </a:rPr>
-              <a:t>•  Aprender a cazar amenazas de forma proactiva: buscar en la telemetría lo que ninguna alerta disparó, partiendo de hipótesis fundadas en ATT&amp;CK y en la inteligencia de amenazas. Aplicarás un ciclo repetible (hipótesis → investigación → hallazgo → nueva detección) y evitarás el "hunting" improvisado que no deja aprendizaje.</a:t>
+              <a:t>•  Aprender a cazar amenazas de forma proactiva: buscar en la telemetría lo que ninguna alerta disparó, partiendo de hipótesis fundadas en ATT&amp;CK y en la inteligencia de amenazas. Aplicarás un ciclo…</a:t>
             </a:r>
           </a:p>
         </p:txBody>
@@ -4092,7 +4753,7 @@
                   <a:srgbClr val="0B3D2E"/>
                 </a:solidFill>
               </a:rPr>
-              <a:t>📖 Definiciones y características</a:t>
+              <a:t>🧠 Explicación en profundidad</a:t>
             </a:r>
           </a:p>
         </p:txBody>
@@ -4130,82 +4791,97 @@
                   <a:srgbClr val="22282E"/>
                 </a:solidFill>
               </a:rPr>
-              <a:t>•  Threat hunting: búsqueda proactiva e iterativa de amenazas que evadieron los controles automáticos. Característica: parte de una hipótesis, no de una alerta.</a:t>
-            </a:r>
-          </a:p>
-          <a:p>
-            <a:pPr>
-              <a:spcAft>
-                <a:spcPts val="600"/>
-              </a:spcAft>
-            </a:pPr>
-            <a:r>
-              <a:rPr sz="1500">
-                <a:solidFill>
-                  <a:srgbClr val="22282E"/>
-                </a:solidFill>
-              </a:rPr>
-              <a:t>•  Hipótesis de caza: afirmación comprobable sobre actividad adversaria posible en el entorno. Característica: concreta, ligada a datos disponibles y a una técnica.</a:t>
-            </a:r>
-          </a:p>
-          <a:p>
-            <a:pPr>
-              <a:spcAft>
-                <a:spcPts val="600"/>
-              </a:spcAft>
-            </a:pPr>
-            <a:r>
-              <a:rPr sz="1500">
-                <a:solidFill>
-                  <a:srgbClr val="22282E"/>
-                </a:solidFill>
-              </a:rPr>
-              <a:t>•  Hunting Maturity Model (HMM): escala de HM0 (solo alertas) a HM4 (caza automatizada). Característica: mide la capacidad del equipo.</a:t>
-            </a:r>
-          </a:p>
-          <a:p>
-            <a:pPr>
-              <a:spcAft>
-                <a:spcPts val="600"/>
-              </a:spcAft>
-            </a:pPr>
-            <a:r>
-              <a:rPr sz="1500">
-                <a:solidFill>
-                  <a:srgbClr val="22282E"/>
-                </a:solidFill>
-              </a:rPr>
-              <a:t>•  TaHiTI: metodología de hunting dirigida por inteligencia de amenazas (Targeted Hunting integrating Threat Intelligence). Característica: enlaza intel con abuso concreto.</a:t>
-            </a:r>
-          </a:p>
-          <a:p>
-            <a:pPr>
-              <a:spcAft>
-                <a:spcPts val="600"/>
-              </a:spcAft>
-            </a:pPr>
-            <a:r>
-              <a:rPr sz="1500">
-                <a:solidFill>
-                  <a:srgbClr val="22282E"/>
-                </a:solidFill>
-              </a:rPr>
-              <a:t>•  PEAK: marco moderno (Prepare, Execute, Act with Knowledge) para cacerías de hipótesis, baseline y ML. Característica: estructura y documenta el proceso.</a:t>
-            </a:r>
-          </a:p>
-          <a:p>
-            <a:pPr>
-              <a:spcAft>
-                <a:spcPts val="600"/>
-              </a:spcAft>
-            </a:pPr>
-            <a:r>
-              <a:rPr sz="1500">
-                <a:solidFill>
-                  <a:srgbClr val="22282E"/>
-                </a:solidFill>
-              </a:rPr>
-              <a:t>•  Baseline: modelo de lo normal en el entorno. Característica: sin él, no se distingue lo anómalo.</a:t>
+              <a:t>•  Threat hunting es una investigación proactiva y acotada que parte de una hipótesis falsable; no consiste en recorrer dashboards esperando algo extraño. La hipótesis nombra actor o mecanismo, objeto…</a:t>
+            </a:r>
+          </a:p>
+          <a:p>
+            <a:pPr>
+              <a:spcAft>
+                <a:spcPts val="600"/>
+              </a:spcAft>
+            </a:pPr>
+            <a:r>
+              <a:rPr sz="1500">
+                <a:solidFill>
+                  <a:srgbClr val="22282E"/>
+                </a:solidFill>
+              </a:rPr>
+              <a:t>•  Una anomalía no equivale a malicia: puede revelar administración legítima o mala calidad de datos. Se compara con una línea base pertinente y se buscan pruebas que también puedan refutar la…</a:t>
+            </a:r>
+          </a:p>
+          <a:p>
+            <a:pPr>
+              <a:spcAft>
+                <a:spcPts val="600"/>
+              </a:spcAft>
+            </a:pPr>
+            <a:r>
+              <a:rPr sz="1500">
+                <a:solidFill>
+                  <a:srgbClr val="22282E"/>
+                </a:solidFill>
+              </a:rPr>
+              <a:t>•  «Buscar actividad rara» no indica qué observar ni cuándo terminar. En cambio: «una cuenta de backup, que no debería iniciar sesiones interactivas, pudo usar RDP durante la madrugada; deberían existir…</a:t>
+            </a:r>
+          </a:p>
+          <a:p>
+            <a:pPr>
+              <a:spcAft>
+                <a:spcPts val="600"/>
+              </a:spcAft>
+            </a:pPr>
+            <a:r>
+              <a:rPr sz="1500">
+                <a:solidFill>
+                  <a:srgbClr val="22282E"/>
+                </a:solidFill>
+              </a:rPr>
+              <a:t>•  La hipótesis incluye alternativas benignas. Mantenimiento aprobado podría explicar la sesión; una cuenta mal clasificada podría invalidar la línea base. Buscar activamente esas explicaciones reduce…</a:t>
+            </a:r>
+          </a:p>
+          <a:p>
+            <a:pPr>
+              <a:spcAft>
+                <a:spcPts val="600"/>
+              </a:spcAft>
+            </a:pPr>
+            <a:r>
+              <a:rPr sz="1500">
+                <a:solidFill>
+                  <a:srgbClr val="22282E"/>
+                </a:solidFill>
+              </a:rPr>
+              <a:t>•  Primero se mide frecuencia y distribución, luego se pivota por origen, destino, proceso, privilegio y red. Cada consulta responde una pregunta escrita. Si un resultado cambia la hipótesis, se…</a:t>
+            </a:r>
+          </a:p>
+          <a:p>
+            <a:pPr>
+              <a:spcAft>
+                <a:spcPts val="600"/>
+              </a:spcAft>
+            </a:pPr>
+            <a:r>
+              <a:rPr sz="1500">
+                <a:solidFill>
+                  <a:srgbClr val="22282E"/>
+                </a:solidFill>
+              </a:rPr>
+              <a:t>•  Confirmado inicia respuesta y alcance. Refutado mejora conocimiento normal. Inconcluso identifica exactamente el dato ausente; no se presenta como «no hay amenaza». El diagrama termina en detección…</a:t>
+            </a:r>
+          </a:p>
+          <a:p>
+            <a:pPr>
+              <a:spcAft>
+                <a:spcPts val="600"/>
+              </a:spcAft>
+            </a:pPr>
+            <a:r>
+              <a:rPr sz="1500">
+                <a:solidFill>
+                  <a:srgbClr val="22282E"/>
+                </a:solidFill>
+              </a:rPr>
+              <a:t>•  Una línea base no es un promedio universal. Se segmenta por rol de activo, tipo de cuenta, horario y estacionalidad. Un controlador de dominio y una estación de diseño no comparten normalidad. Los…</a:t>
             </a:r>
           </a:p>
         </p:txBody>
@@ -4256,7 +4932,7 @@
                   <a:srgbClr val="0B3D2E"/>
                 </a:solidFill>
               </a:rPr>
-              <a:t>🧰 Herramientas y preparación</a:t>
+              <a:t>📔 Glosario</a:t>
             </a:r>
           </a:p>
         </p:txBody>
@@ -4294,67 +4970,97 @@
                   <a:srgbClr val="22282E"/>
                 </a:solidFill>
               </a:rPr>
-              <a:t>•  Tu SIEM (Splunk/Elastic) con telemetría de endpoint y red de clases previas.</a:t>
-            </a:r>
-          </a:p>
-          <a:p>
-            <a:pPr>
-              <a:spcAft>
-                <a:spcPts val="600"/>
-              </a:spcAft>
-            </a:pPr>
-            <a:r>
-              <a:rPr sz="1500">
-                <a:solidFill>
-                  <a:srgbClr val="22282E"/>
-                </a:solidFill>
-              </a:rPr>
-              <a:t>•  Jupyter Notebook o un documento estructurado para registrar la cacería.</a:t>
-            </a:r>
-          </a:p>
-          <a:p>
-            <a:pPr>
-              <a:spcAft>
-                <a:spcPts val="600"/>
-              </a:spcAft>
-            </a:pPr>
-            <a:r>
-              <a:rPr sz="1500">
-                <a:solidFill>
-                  <a:srgbClr val="22282E"/>
-                </a:solidFill>
-              </a:rPr>
-              <a:t>•  Atomic Red Team para generar actividad de prueba que después "cazarás" (en laboratorio propio).</a:t>
-            </a:r>
-          </a:p>
-          <a:p>
-            <a:pPr>
-              <a:spcAft>
-                <a:spcPts val="600"/>
-              </a:spcAft>
-            </a:pPr>
-            <a:r>
-              <a:rPr sz="1500">
-                <a:solidFill>
-                  <a:srgbClr val="22282E"/>
-                </a:solidFill>
-              </a:rPr>
-              <a:t>•  El catálogo ATT&amp;CK como fuente de hipótesis.</a:t>
-            </a:r>
-          </a:p>
-          <a:p>
-            <a:pPr>
-              <a:spcAft>
-                <a:spcPts val="600"/>
-              </a:spcAft>
-            </a:pPr>
-            <a:r>
-              <a:rPr sz="1500">
-                <a:solidFill>
-                  <a:srgbClr val="22282E"/>
-                </a:solidFill>
-              </a:rPr>
-              <a:t>•  Toda ejecución de técnicas para practicar la caza se realiza en tu entorno aislado y autorizado.</a:t>
+              <a:t>•  Hipótesis falsable: afirmación que la evidencia puede refutar.</a:t>
+            </a:r>
+          </a:p>
+          <a:p>
+            <a:pPr>
+              <a:spcAft>
+                <a:spcPts val="600"/>
+              </a:spcAft>
+            </a:pPr>
+            <a:r>
+              <a:rPr sz="1500">
+                <a:solidFill>
+                  <a:srgbClr val="22282E"/>
+                </a:solidFill>
+              </a:rPr>
+              <a:t>•  Baseline: comportamiento normal para un contexto.</a:t>
+            </a:r>
+          </a:p>
+          <a:p>
+            <a:pPr>
+              <a:spcAft>
+                <a:spcPts val="600"/>
+              </a:spcAft>
+            </a:pPr>
+            <a:r>
+              <a:rPr sz="1500">
+                <a:solidFill>
+                  <a:srgbClr val="22282E"/>
+                </a:solidFill>
+              </a:rPr>
+              <a:t>•  Pivote: consulta que sigue una entidad relacionada.</a:t>
+            </a:r>
+          </a:p>
+          <a:p>
+            <a:pPr>
+              <a:spcAft>
+                <a:spcPts val="600"/>
+              </a:spcAft>
+            </a:pPr>
+            <a:r>
+              <a:rPr sz="1500">
+                <a:solidFill>
+                  <a:srgbClr val="22282E"/>
+                </a:solidFill>
+              </a:rPr>
+              <a:t>•  Scope: límites temporales, técnicos y organizativos.</a:t>
+            </a:r>
+          </a:p>
+          <a:p>
+            <a:pPr>
+              <a:spcAft>
+                <a:spcPts val="600"/>
+              </a:spcAft>
+            </a:pPr>
+            <a:r>
+              <a:rPr sz="1500">
+                <a:solidFill>
+                  <a:srgbClr val="22282E"/>
+                </a:solidFill>
+              </a:rPr>
+              <a:t>•  Hallazgo: observación sustentada que requiere acción.</a:t>
+            </a:r>
+          </a:p>
+          <a:p>
+            <a:pPr>
+              <a:spcAft>
+                <a:spcPts val="600"/>
+              </a:spcAft>
+            </a:pPr>
+            <a:r>
+              <a:rPr sz="1500">
+                <a:solidFill>
+                  <a:srgbClr val="22282E"/>
+                </a:solidFill>
+              </a:rPr>
+              <a:t>•  Inconcluso: evidencia insuficiente para decidir.</a:t>
+            </a:r>
+          </a:p>
+          <a:p>
+            <a:pPr>
+              <a:spcAft>
+                <a:spcPts val="600"/>
+              </a:spcAft>
+            </a:pPr>
+            <a:r>
+              <a:rPr sz="1500">
+                <a:solidFill>
+                  <a:srgbClr val="22282E"/>
+                </a:solidFill>
+              </a:rPr>
+              <a:t>•  Paquete de hunt: hipótesis, datos, consultas y resultados reproducibles.</a:t>
             </a:r>
           </a:p>
         </p:txBody>
@@ -4405,7 +5111,7 @@
                   <a:srgbClr val="0B3D2E"/>
                 </a:solidFill>
               </a:rPr>
-              <a:t>🧪 Laboratorio guiado — Una cacería de principio a fin</a:t>
+              <a:t>📖 Definiciones y características</a:t>
             </a:r>
           </a:p>
         </p:txBody>
@@ -4443,97 +5149,82 @@
                   <a:srgbClr val="22282E"/>
                 </a:solidFill>
               </a:rPr>
-              <a:t>•  Prepara (PEAK). Elige una técnica: T1053.005 (Scheduled Task/Job). Formula la hipótesis: "un adversario ha creado tareas programadas para persistir en algún host".</a:t>
-            </a:r>
-          </a:p>
-          <a:p>
-            <a:pPr>
-              <a:spcAft>
-                <a:spcPts val="600"/>
-              </a:spcAft>
-            </a:pPr>
-            <a:r>
-              <a:rPr sz="1500">
-                <a:solidFill>
-                  <a:srgbClr val="22282E"/>
-                </a:solidFill>
-              </a:rPr>
-              <a:t>•  Define datos y ámbito. Identifica la telemetría (Sysmon Event ID 1/schtasks, Security 4698) y el rango temporal (últimos 7 días).</a:t>
-            </a:r>
-          </a:p>
-          <a:p>
-            <a:pPr>
-              <a:spcAft>
-                <a:spcPts val="600"/>
-              </a:spcAft>
-            </a:pPr>
-            <a:r>
-              <a:rPr sz="1500">
-                <a:solidFill>
-                  <a:srgbClr val="22282E"/>
-                </a:solidFill>
-              </a:rPr>
-              <a:t>•  Construye la baseline. Lista las tareas programadas legítimas y sus creadores habituales para separar ruido de señal.</a:t>
-            </a:r>
-          </a:p>
-          <a:p>
-            <a:pPr>
-              <a:spcAft>
-                <a:spcPts val="600"/>
-              </a:spcAft>
-            </a:pPr>
-            <a:r>
-              <a:rPr sz="1500">
-                <a:solidFill>
-                  <a:srgbClr val="22282E"/>
-                </a:solidFill>
-              </a:rPr>
-              <a:t>•  Ejecuta la búsqueda. En el SIEM, filtra creaciones de tareas y agrupa por host, usuario y binario invocado; ordena por rareza.</a:t>
-            </a:r>
-          </a:p>
-          <a:p>
-            <a:pPr>
-              <a:spcAft>
-                <a:spcPts val="600"/>
-              </a:spcAft>
-            </a:pPr>
-            <a:r>
-              <a:rPr sz="1500">
-                <a:solidFill>
-                  <a:srgbClr val="22282E"/>
-                </a:solidFill>
-              </a:rPr>
-              <a:t>•  Investiga outliers. Para las tareas raras, pivota: ¿qué proceso las creó?, ¿hay conexión de red asociada?, ¿el binario está firmado?</a:t>
-            </a:r>
-          </a:p>
-          <a:p>
-            <a:pPr>
-              <a:spcAft>
-                <a:spcPts val="600"/>
-              </a:spcAft>
-            </a:pPr>
-            <a:r>
-              <a:rPr sz="1500">
-                <a:solidFill>
-                  <a:srgbClr val="22282E"/>
-                </a:solidFill>
-              </a:rPr>
-              <a:t>•  Genera actividad de control. Con Atomic Red Team lanza una técnica de tarea programada y confirma que tu búsqueda la habría encontrado.</a:t>
-            </a:r>
-          </a:p>
-          <a:p>
-            <a:pPr>
-              <a:spcAft>
-                <a:spcPts val="600"/>
-              </a:spcAft>
-            </a:pPr>
-            <a:r>
-              <a:rPr sz="1500">
-                <a:solidFill>
-                  <a:srgbClr val="22282E"/>
-                </a:solidFill>
-              </a:rPr>
-              <a:t>•  Capitaliza. Convierte la búsqueda en una regla Sigma/alerta para automatizar la detección a futuro.</a:t>
+              <a:t>•  Threat hunting: búsqueda proactiva e iterativa de amenazas que evadieron los controles automáticos. Característica: parte de una hipótesis, no de una alerta.</a:t>
+            </a:r>
+          </a:p>
+          <a:p>
+            <a:pPr>
+              <a:spcAft>
+                <a:spcPts val="600"/>
+              </a:spcAft>
+            </a:pPr>
+            <a:r>
+              <a:rPr sz="1500">
+                <a:solidFill>
+                  <a:srgbClr val="22282E"/>
+                </a:solidFill>
+              </a:rPr>
+              <a:t>•  Hipótesis de caza: afirmación comprobable sobre actividad adversaria posible en el entorno. Característica: concreta, ligada a datos disponibles y a una técnica.</a:t>
+            </a:r>
+          </a:p>
+          <a:p>
+            <a:pPr>
+              <a:spcAft>
+                <a:spcPts val="600"/>
+              </a:spcAft>
+            </a:pPr>
+            <a:r>
+              <a:rPr sz="1500">
+                <a:solidFill>
+                  <a:srgbClr val="22282E"/>
+                </a:solidFill>
+              </a:rPr>
+              <a:t>•  Hunting Maturity Model (HMM): escala de HM0 (solo alertas) a HM4 (caza automatizada). Característica: mide la capacidad del equipo.</a:t>
+            </a:r>
+          </a:p>
+          <a:p>
+            <a:pPr>
+              <a:spcAft>
+                <a:spcPts val="600"/>
+              </a:spcAft>
+            </a:pPr>
+            <a:r>
+              <a:rPr sz="1500">
+                <a:solidFill>
+                  <a:srgbClr val="22282E"/>
+                </a:solidFill>
+              </a:rPr>
+              <a:t>•  TaHiTI: metodología de hunting dirigida por inteligencia de amenazas (Targeted Hunting integrating Threat Intelligence). Característica: enlaza intel con abuso concreto.</a:t>
+            </a:r>
+          </a:p>
+          <a:p>
+            <a:pPr>
+              <a:spcAft>
+                <a:spcPts val="600"/>
+              </a:spcAft>
+            </a:pPr>
+            <a:r>
+              <a:rPr sz="1500">
+                <a:solidFill>
+                  <a:srgbClr val="22282E"/>
+                </a:solidFill>
+              </a:rPr>
+              <a:t>•  PEAK: marco moderno (Prepare, Execute, Act with Knowledge) para cacerías de hipótesis, baseline y ML. Característica: estructura y documenta el proceso.</a:t>
+            </a:r>
+          </a:p>
+          <a:p>
+            <a:pPr>
+              <a:spcAft>
+                <a:spcPts val="600"/>
+              </a:spcAft>
+            </a:pPr>
+            <a:r>
+              <a:rPr sz="1500">
+                <a:solidFill>
+                  <a:srgbClr val="22282E"/>
+                </a:solidFill>
+              </a:rPr>
+              <a:t>•  Baseline: modelo de lo normal en el entorno. Característica: sin él, no se distingue lo anómalo.</a:t>
             </a:r>
           </a:p>
         </p:txBody>
@@ -4584,7 +5275,7 @@
                   <a:srgbClr val="0B3D2E"/>
                 </a:solidFill>
               </a:rPr>
-              <a:t>✍️ Ejercicios</a:t>
+              <a:t>🔍 Hunt completo — cuenta de backup con sesión interactiva</a:t>
             </a:r>
           </a:p>
         </p:txBody>
@@ -4622,82 +5313,37 @@
                   <a:srgbClr val="22282E"/>
                 </a:solidFill>
               </a:rPr>
-              <a:t>•  Redacta 3 hipótesis de caza a partir de técnicas ATT&amp;CK distintas.</a:t>
-            </a:r>
-          </a:p>
-          <a:p>
-            <a:pPr>
-              <a:spcAft>
-                <a:spcPts val="600"/>
-              </a:spcAft>
-            </a:pPr>
-            <a:r>
-              <a:rPr sz="1500">
-                <a:solidFill>
-                  <a:srgbClr val="22282E"/>
-                </a:solidFill>
-              </a:rPr>
-              <a:t>•  Sitúa a tu SOC en el HMM y define el paso para subir un nivel.</a:t>
-            </a:r>
-          </a:p>
-          <a:p>
-            <a:pPr>
-              <a:spcAft>
-                <a:spcPts val="600"/>
-              </a:spcAft>
-            </a:pPr>
-            <a:r>
-              <a:rPr sz="1500">
-                <a:solidFill>
-                  <a:srgbClr val="22282E"/>
-                </a:solidFill>
-              </a:rPr>
-              <a:t>•  Construye una baseline de procesos que hacen conexiones salientes.</a:t>
-            </a:r>
-          </a:p>
-          <a:p>
-            <a:pPr>
-              <a:spcAft>
-                <a:spcPts val="600"/>
-              </a:spcAft>
-            </a:pPr>
-            <a:r>
-              <a:rPr sz="1500">
-                <a:solidFill>
-                  <a:srgbClr val="22282E"/>
-                </a:solidFill>
-              </a:rPr>
-              <a:t>•  Diseña una cacería de "living off the land" (LOLBins) y sus consultas.</a:t>
-            </a:r>
-          </a:p>
-          <a:p>
-            <a:pPr>
-              <a:spcAft>
-                <a:spcPts val="600"/>
-              </a:spcAft>
-            </a:pPr>
-            <a:r>
-              <a:rPr sz="1500">
-                <a:solidFill>
-                  <a:srgbClr val="22282E"/>
-                </a:solidFill>
-              </a:rPr>
-              <a:t>•  Convierte un hallazgo de caza en una regla Sigma.</a:t>
-            </a:r>
-          </a:p>
-          <a:p>
-            <a:pPr>
-              <a:spcAft>
-                <a:spcPts val="600"/>
-              </a:spcAft>
-            </a:pPr>
-            <a:r>
-              <a:rPr sz="1500">
-                <a:solidFill>
-                  <a:srgbClr val="22282E"/>
-                </a:solidFill>
-              </a:rPr>
-              <a:t>•  Define 3 métricas de éxito de una cacería.</a:t>
+              <a:t>•  Hipótesis: una cuenta destinada a backup pudo iniciar una sesión interactiva en servidores fuera de mantenimiento. Alternativas: intervención aprobada, inventario incorrecto o servicio mal…</a:t>
+            </a:r>
+          </a:p>
+          <a:p>
+            <a:pPr>
+              <a:spcAft>
+                <a:spcPts val="600"/>
+              </a:spcAft>
+            </a:pPr>
+            <a:r>
+              <a:rPr sz="1500">
+                <a:solidFill>
+                  <a:srgbClr val="22282E"/>
+                </a:solidFill>
+              </a:rPr>
+              <a:t>•  Primero se valida que el inventario identifica la cuenta y que la telemetría distingue sesión interactiva. Se mide frecuencia por tipo, origen y destino. Aparece un acceso desde un jump host durante…</a:t>
+            </a:r>
+          </a:p>
+          <a:p>
+            <a:pPr>
+              <a:spcAft>
+                <a:spcPts val="600"/>
+              </a:spcAft>
+            </a:pPr>
+            <a:r>
+              <a:rPr sz="1500">
+                <a:solidFill>
+                  <a:srgbClr val="22282E"/>
+                </a:solidFill>
+              </a:rPr>
+              <a:t>•  El hunt no declara «sin compromiso». Produce dos salidas: corregir inventario y logging del segmento, además de una consulta candidata que alerta cuando una cuenta de servicio usa sesión interactiva…</a:t>
             </a:r>
           </a:p>
         </p:txBody>
@@ -4748,7 +5394,7 @@
                   <a:srgbClr val="0B3D2E"/>
                 </a:solidFill>
               </a:rPr>
-              <a:t>📝 Reto verificable</a:t>
+              <a:t>✅ Criterio de dominio</a:t>
             </a:r>
           </a:p>
         </p:txBody>
@@ -4786,7 +5432,7 @@
                   <a:srgbClr val="22282E"/>
                 </a:solidFill>
               </a:rPr>
-              <a:t>•  Ejecuta una cacería completa documentada (hipótesis, datos, consultas, hallazgos y detección resultante) sobre una técnica ATT&amp;CK a tu elección. Criterio de aceptación: la actividad de control que generas con Atomic Red Team aparece en tus resultados de caza, distinguible de la baseline, y entregas una detección nueva (Sigma o saved search) derivada del hallazgo.</a:t>
+              <a:t>•  Se evalúa si la hipótesis era falsable, si se buscaron explicaciones benignas, si cada pivote respondió una pregunta y si el resultado distingue confirmado, refutado e inconcluso. Encontrar muchos…</a:t>
             </a:r>
           </a:p>
         </p:txBody>
